--- a/COLAB source/백테스팅_워크포워드_강의개요.pptx
+++ b/COLAB source/백테스팅_워크포워드_강의개요.pptx
@@ -5906,7 +5906,7 @@
                 </a:solidFill>
                 <a:latin typeface="Malgun Gothic"/>
               </a:rPr>
-              <a:t>RSI가 30을 상향 돌파</a:t>
+              <a:t>RSI가 45를 상향 돌파</a:t>
             </a:r>
           </a:p>
         </p:txBody>
@@ -5948,7 +5948,7 @@
                 </a:solidFill>
                 <a:latin typeface="Malgun Gothic"/>
               </a:rPr>
-              <a:t>전일 RSI&lt;30 → 당일 RSI≥30 (과매도 탈출)</a:t>
+              <a:t>상승추세 속 얕은 눌림목에서 반등 진입</a:t>
             </a:r>
           </a:p>
         </p:txBody>
@@ -6907,7 +6907,7 @@
                 </a:solidFill>
                 <a:latin typeface="Malgun Gothic"/>
               </a:rPr>
-              <a:t>현금 상태 &amp; 200일선 위 &amp; RSI 30 상향돌파
+              <a:t>현금 상태 &amp; 200일선 위 &amp; RSI 45 상향돌파
 → 전액 매수</a:t>
             </a:r>
           </a:p>
@@ -7363,7 +7363,7 @@
                 </a:solidFill>
                 <a:latin typeface="Malgun Gothic"/>
               </a:rPr>
-              <a:t>     if flat and price &gt; ma200 and rsi_crossed_up(30):  buy_all()</a:t>
+              <a:t>     if flat and price &gt; ma200 and rsi_crossed_up(45):  buy_all()</a:t>
             </a:r>
           </a:p>
           <a:p>
